--- a/pptx/midterm/REMUS_Background_Slide_1.pptx
+++ b/pptx/midterm/REMUS_Background_Slide_1.pptx
@@ -5,10 +5,10 @@
     <p:sldMasterId xmlns:r="http://schemas.openxmlformats.org/officeDocument/2006/relationships" id="2147483648" r:id="rId1"/>
   </p:sldMasterIdLst>
   <p:notesMasterIdLst>
-    <p:notesMasterId r:id="Rb7cc27d7fb3240a8"/>
+    <p:notesMasterId r:id="R3d934b5c31f049f4"/>
   </p:notesMasterIdLst>
   <p:sldIdLst>
-    <p:sldId id="256" r:id="Rd991192e4fd849b7"/>
+    <p:sldId id="256" r:id="R26c46175b20c4b6f"/>
   </p:sldIdLst>
   <p:sldSz cx="12192000" cy="6858000" type="screen16x9"/>
   <p:notesSz cx="6858000" cy="9144000"/>
@@ -775,8 +775,8 @@
 </file>
 
 <file path=ppt/slides/slide1.xml><?xml version="1.0" encoding="utf-8"?>
-<p:sld xmlns:a="http://schemas.openxmlformats.org/drawingml/2006/main" xmlns:p="http://schemas.openxmlformats.org/presentationml/2006/main">
-  <p:cSld>
+<p:sld xmlns:a="http://schemas.openxmlformats.org/drawingml/2006/main" xmlns:r="http://schemas.openxmlformats.org/officeDocument/2006/relationships" xmlns:p="http://schemas.openxmlformats.org/presentationml/2006/main">
+  <p:cSld xmlns:a="http://schemas.openxmlformats.org/drawingml/2006/main" xmlns:p="http://schemas.openxmlformats.org/presentationml/2006/main" xmlns:r="http://schemas.openxmlformats.org/officeDocument/2006/relationships">
     <p:bg>
       <p:bgPr>
         <a:solidFill xmlns:a="http://schemas.openxmlformats.org/drawingml/2006/main">
@@ -814,16 +814,27 @@
             <a:noAutofit/>
           </a:bodyPr>
           <a:lstStyle xmlns:a="http://schemas.openxmlformats.org/drawingml/2006/main"/>
-          <a:p xmlns:a="http://schemas.openxmlformats.org/drawingml/2006/main">
-            <a:r>
-              <a:rPr lang="en-US" sz="3200" b="1">
+          <a:p>
+            <a:pPr algn="l">
+              <a:lnSpc>
+                <a:spcPct val="90000"/>
+              </a:lnSpc>
+              <a:defRPr sz="3200" b="1">
                 <a:solidFill>
                   <a:srgbClr val="183B56"/>
                 </a:solidFill>
                 <a:latin typeface="Arial"/>
                 <a:ea typeface="Arial"/>
+              </a:defRPr>
+            </a:pPr>
+            <a:r>
+              <a:rPr sz="3200" b="1">
+                <a:solidFill>
+                  <a:srgbClr val="183B56"/>
+                </a:solidFill>
+                <a:latin typeface="Arial"/>
               </a:rPr>
-              <a:t>1. From RTL Simulation to Multi-FPGA Prototyping</a:t>
+              <a:t>Intro: From RTL Simulation to Multi-FPGA Prototyping</a:t>
             </a:r>
           </a:p>
         </p:txBody>
@@ -1971,7 +1982,7 @@
           <p:nvPr/>
         </p:nvPicPr>
         <p:blipFill>
-          <a:blip xmlns:r="http://schemas.openxmlformats.org/officeDocument/2006/relationships" r:embed="R2de3c3112f384698"/>
+          <a:blip xmlns:r="http://schemas.openxmlformats.org/officeDocument/2006/relationships" r:embed="R65d3e6a315c44c49"/>
           <a:srcRect l="12280" t="25518" r="12200" b="19936"/>
           <a:stretch>
             <a:fillRect/>
@@ -1996,7 +2007,7 @@
           <p:nvPr/>
         </p:nvPicPr>
         <p:blipFill>
-          <a:blip xmlns:r="http://schemas.openxmlformats.org/officeDocument/2006/relationships" r:embed="R161f83e6988347c9"/>
+          <a:blip xmlns:r="http://schemas.openxmlformats.org/officeDocument/2006/relationships" r:embed="Rc3daf020571c4aa5"/>
           <a:srcRect l="21371" t="23684" r="21291" b="20972"/>
           <a:stretch>
             <a:fillRect/>
@@ -2021,7 +2032,7 @@
           <p:nvPr/>
         </p:nvPicPr>
         <p:blipFill>
-          <a:blip xmlns:r="http://schemas.openxmlformats.org/officeDocument/2006/relationships" r:embed="Ra8451c42c9ff414f"/>
+          <a:blip xmlns:r="http://schemas.openxmlformats.org/officeDocument/2006/relationships" r:embed="R17646a6781ab4f24"/>
           <a:srcRect l="21371" t="23684" r="21291" b="20972"/>
           <a:stretch>
             <a:fillRect/>
@@ -2046,7 +2057,7 @@
           <p:nvPr/>
         </p:nvPicPr>
         <p:blipFill>
-          <a:blip xmlns:r="http://schemas.openxmlformats.org/officeDocument/2006/relationships" r:embed="Ra1dc27e810e94956"/>
+          <a:blip xmlns:r="http://schemas.openxmlformats.org/officeDocument/2006/relationships" r:embed="R9548d3dd9b064b29"/>
           <a:srcRect l="21371" t="23684" r="21291" b="20972"/>
           <a:stretch>
             <a:fillRect/>

--- a/pptx/midterm/REMUS_Background_Slide_1.pptx
+++ b/pptx/midterm/REMUS_Background_Slide_1.pptx
@@ -5,10 +5,10 @@
     <p:sldMasterId xmlns:r="http://schemas.openxmlformats.org/officeDocument/2006/relationships" id="2147483648" r:id="rId1"/>
   </p:sldMasterIdLst>
   <p:notesMasterIdLst>
-    <p:notesMasterId r:id="R3d934b5c31f049f4"/>
+    <p:notesMasterId r:id="R4d27007cc0974ec2"/>
   </p:notesMasterIdLst>
   <p:sldIdLst>
-    <p:sldId id="256" r:id="R26c46175b20c4b6f"/>
+    <p:sldId id="256" r:id="R65ee1073766644e3"/>
   </p:sldIdLst>
   <p:sldSz cx="12192000" cy="6858000" type="screen16x9"/>
   <p:notesSz cx="6858000" cy="9144000"/>
@@ -337,13 +337,13 @@
         <a:srgbClr val="E7E6E6"/>
       </a:lt2>
       <a:accent1>
-        <a:srgbClr val="183B56"/>
+        <a:srgbClr val="C00000"/>
       </a:accent1>
       <a:accent2>
-        <a:srgbClr val="008C95"/>
+        <a:srgbClr val="70AD47"/>
       </a:accent2>
       <a:accent3>
-        <a:srgbClr val="DF973E"/>
+        <a:srgbClr val="ED7D31"/>
       </a:accent3>
       <a:accent4>
         <a:srgbClr val="FFC000"/>
@@ -821,7 +821,7 @@
               </a:lnSpc>
               <a:defRPr sz="3200" b="1">
                 <a:solidFill>
-                  <a:srgbClr val="183B56"/>
+                  <a:srgbClr val="C00000"/>
                 </a:solidFill>
                 <a:latin typeface="Arial"/>
                 <a:ea typeface="Arial"/>
@@ -830,7 +830,7 @@
             <a:r>
               <a:rPr sz="3200" b="1">
                 <a:solidFill>
-                  <a:srgbClr val="183B56"/>
+                  <a:srgbClr val="C00000"/>
                 </a:solidFill>
                 <a:latin typeface="Arial"/>
               </a:rPr>
@@ -854,10 +854,12 @@
             <a:avLst/>
           </a:prstGeom>
           <a:solidFill>
-            <a:srgbClr val="008C95"/>
-          </a:solidFill>
-          <a:ln>
-            <a:noFill/>
+            <a:srgbClr val="C55A11"/>
+          </a:solidFill>
+          <a:ln>
+            <a:solidFill>
+              <a:srgbClr val="C55A11"/>
+            </a:solidFill>
           </a:ln>
         </p:spPr>
         <p:txBody>
@@ -868,7 +870,7 @@
           <a:p>
             <a:endParaRPr lang="en-US" sz="1800">
               <a:solidFill>
-                <a:srgbClr val="20354A"/>
+                <a:srgbClr val="C55A11"/>
               </a:solidFill>
               <a:latin typeface="Arial"/>
               <a:ea typeface="Arial"/>
@@ -893,7 +895,7 @@
             </a:avLst>
           </a:prstGeom>
           <a:solidFill>
-            <a:srgbClr val="EAF4F3"/>
+            <a:srgbClr val="F1F7EC"/>
           </a:solidFill>
           <a:ln>
             <a:noFill/>
@@ -907,7 +909,7 @@
           <a:p>
             <a:endParaRPr lang="en-US" sz="1800">
               <a:solidFill>
-                <a:srgbClr val="20354A"/>
+                <a:srgbClr val="1F1F1F"/>
               </a:solidFill>
               <a:latin typeface="Arial"/>
               <a:ea typeface="Arial"/>
@@ -930,7 +932,7 @@
             <a:avLst/>
           </a:prstGeom>
           <a:solidFill>
-            <a:srgbClr val="BDCBD4"/>
+            <a:srgbClr val="D1D1D1"/>
           </a:solidFill>
           <a:ln>
             <a:noFill/>
@@ -944,7 +946,7 @@
           <a:p>
             <a:endParaRPr lang="en-US" sz="1800">
               <a:solidFill>
-                <a:srgbClr val="20354A"/>
+                <a:srgbClr val="1F1F1F"/>
               </a:solidFill>
               <a:latin typeface="Arial"/>
               <a:ea typeface="Arial"/>
@@ -980,7 +982,7 @@
             <a:r>
               <a:rPr lang="en-US" sz="2200" b="1">
                 <a:solidFill>
-                  <a:srgbClr val="183B56"/>
+                  <a:srgbClr val="333333"/>
                 </a:solidFill>
                 <a:latin typeface="Arial"/>
                 <a:ea typeface="Arial"/>
@@ -1005,7 +1007,7 @@
             <a:avLst/>
           </a:prstGeom>
           <a:solidFill>
-            <a:srgbClr val="008C95"/>
+            <a:srgbClr val="70AD47"/>
           </a:solidFill>
           <a:ln>
             <a:noFill/>
@@ -1019,7 +1021,7 @@
           <a:p>
             <a:endParaRPr lang="en-US" sz="1800">
               <a:solidFill>
-                <a:srgbClr val="20354A"/>
+                <a:srgbClr val="1F1F1F"/>
               </a:solidFill>
               <a:latin typeface="Arial"/>
               <a:ea typeface="Arial"/>
@@ -1055,7 +1057,7 @@
             <a:r>
               <a:rPr lang="en-US" sz="1800">
                 <a:solidFill>
-                  <a:srgbClr val="20354A"/>
+                  <a:srgbClr val="1F1F1F"/>
                 </a:solidFill>
                 <a:latin typeface="Arial"/>
                 <a:ea typeface="Arial"/>
@@ -1080,7 +1082,7 @@
             <a:avLst/>
           </a:prstGeom>
           <a:solidFill>
-            <a:srgbClr val="008C95"/>
+            <a:srgbClr val="70AD47"/>
           </a:solidFill>
           <a:ln>
             <a:noFill/>
@@ -1094,7 +1096,7 @@
           <a:p>
             <a:endParaRPr lang="en-US" sz="1800">
               <a:solidFill>
-                <a:srgbClr val="20354A"/>
+                <a:srgbClr val="1F1F1F"/>
               </a:solidFill>
               <a:latin typeface="Arial"/>
               <a:ea typeface="Arial"/>
@@ -1130,7 +1132,7 @@
             <a:r>
               <a:rPr lang="en-US" sz="1800">
                 <a:solidFill>
-                  <a:srgbClr val="20354A"/>
+                  <a:srgbClr val="1F1F1F"/>
                 </a:solidFill>
                 <a:latin typeface="Arial"/>
                 <a:ea typeface="Arial"/>
@@ -1155,7 +1157,7 @@
             <a:avLst/>
           </a:prstGeom>
           <a:solidFill>
-            <a:srgbClr val="008C95"/>
+            <a:srgbClr val="70AD47"/>
           </a:solidFill>
           <a:ln>
             <a:noFill/>
@@ -1169,7 +1171,7 @@
           <a:p>
             <a:endParaRPr lang="en-US" sz="1800">
               <a:solidFill>
-                <a:srgbClr val="20354A"/>
+                <a:srgbClr val="1F1F1F"/>
               </a:solidFill>
               <a:latin typeface="Arial"/>
               <a:ea typeface="Arial"/>
@@ -1205,7 +1207,7 @@
             <a:r>
               <a:rPr lang="en-US" sz="1800">
                 <a:solidFill>
-                  <a:srgbClr val="20354A"/>
+                  <a:srgbClr val="1F1F1F"/>
                 </a:solidFill>
                 <a:latin typeface="Arial"/>
                 <a:ea typeface="Arial"/>
@@ -1232,7 +1234,7 @@
             </a:avLst>
           </a:prstGeom>
           <a:solidFill>
-            <a:srgbClr val="F1F5F8"/>
+            <a:srgbClr val="F5F5F5"/>
           </a:solidFill>
           <a:ln>
             <a:noFill/>
@@ -1246,7 +1248,7 @@
           <a:p>
             <a:endParaRPr lang="en-US" sz="1800">
               <a:solidFill>
-                <a:srgbClr val="20354A"/>
+                <a:srgbClr val="1F1F1F"/>
               </a:solidFill>
               <a:latin typeface="Arial"/>
               <a:ea typeface="Arial"/>
@@ -1269,7 +1271,7 @@
             <a:avLst/>
           </a:prstGeom>
           <a:solidFill>
-            <a:srgbClr val="BDCBD4"/>
+            <a:srgbClr val="D1D1D1"/>
           </a:solidFill>
           <a:ln>
             <a:noFill/>
@@ -1283,7 +1285,7 @@
           <a:p>
             <a:endParaRPr lang="en-US" sz="1800">
               <a:solidFill>
-                <a:srgbClr val="20354A"/>
+                <a:srgbClr val="1F1F1F"/>
               </a:solidFill>
               <a:latin typeface="Arial"/>
               <a:ea typeface="Arial"/>
@@ -1319,7 +1321,7 @@
             <a:r>
               <a:rPr lang="en-US" sz="2200" b="1">
                 <a:solidFill>
-                  <a:srgbClr val="183B56"/>
+                  <a:srgbClr val="333333"/>
                 </a:solidFill>
                 <a:latin typeface="Arial"/>
                 <a:ea typeface="Arial"/>
@@ -1344,7 +1346,7 @@
             <a:avLst/>
           </a:prstGeom>
           <a:solidFill>
-            <a:srgbClr val="008C95"/>
+            <a:srgbClr val="70AD47"/>
           </a:solidFill>
           <a:ln>
             <a:noFill/>
@@ -1358,7 +1360,7 @@
           <a:p>
             <a:endParaRPr lang="en-US" sz="1800">
               <a:solidFill>
-                <a:srgbClr val="20354A"/>
+                <a:srgbClr val="1F1F1F"/>
               </a:solidFill>
               <a:latin typeface="Arial"/>
               <a:ea typeface="Arial"/>
@@ -1394,7 +1396,7 @@
             <a:r>
               <a:rPr lang="en-US" sz="1800">
                 <a:solidFill>
-                  <a:srgbClr val="20354A"/>
+                  <a:srgbClr val="1F1F1F"/>
                 </a:solidFill>
                 <a:latin typeface="Arial"/>
                 <a:ea typeface="Arial"/>
@@ -1419,7 +1421,7 @@
             <a:avLst/>
           </a:prstGeom>
           <a:solidFill>
-            <a:srgbClr val="008C95"/>
+            <a:srgbClr val="70AD47"/>
           </a:solidFill>
           <a:ln>
             <a:noFill/>
@@ -1433,7 +1435,7 @@
           <a:p>
             <a:endParaRPr lang="en-US" sz="1800">
               <a:solidFill>
-                <a:srgbClr val="20354A"/>
+                <a:srgbClr val="1F1F1F"/>
               </a:solidFill>
               <a:latin typeface="Arial"/>
               <a:ea typeface="Arial"/>
@@ -1469,7 +1471,7 @@
             <a:r>
               <a:rPr lang="en-US" sz="1800">
                 <a:solidFill>
-                  <a:srgbClr val="20354A"/>
+                  <a:srgbClr val="1F1F1F"/>
                 </a:solidFill>
                 <a:latin typeface="Arial"/>
                 <a:ea typeface="Arial"/>
@@ -1494,7 +1496,7 @@
             <a:avLst/>
           </a:prstGeom>
           <a:solidFill>
-            <a:srgbClr val="008C95"/>
+            <a:srgbClr val="70AD47"/>
           </a:solidFill>
           <a:ln>
             <a:noFill/>
@@ -1508,7 +1510,7 @@
           <a:p>
             <a:endParaRPr lang="en-US" sz="1800">
               <a:solidFill>
-                <a:srgbClr val="20354A"/>
+                <a:srgbClr val="1F1F1F"/>
               </a:solidFill>
               <a:latin typeface="Arial"/>
               <a:ea typeface="Arial"/>
@@ -1544,7 +1546,7 @@
             <a:r>
               <a:rPr lang="en-US" sz="1800">
                 <a:solidFill>
-                  <a:srgbClr val="20354A"/>
+                  <a:srgbClr val="1F1F1F"/>
                 </a:solidFill>
                 <a:latin typeface="Arial"/>
                 <a:ea typeface="Arial"/>
@@ -1571,7 +1573,7 @@
             </a:avLst>
           </a:prstGeom>
           <a:solidFill>
-            <a:srgbClr val="FCF4E8"/>
+            <a:srgbClr val="FFF3EF"/>
           </a:solidFill>
           <a:ln>
             <a:noFill/>
@@ -1585,7 +1587,7 @@
           <a:p>
             <a:endParaRPr lang="en-US" sz="1800">
               <a:solidFill>
-                <a:srgbClr val="20354A"/>
+                <a:srgbClr val="1F1F1F"/>
               </a:solidFill>
               <a:latin typeface="Arial"/>
               <a:ea typeface="Arial"/>
@@ -1608,7 +1610,7 @@
             <a:avLst/>
           </a:prstGeom>
           <a:solidFill>
-            <a:srgbClr val="BDCBD4"/>
+            <a:srgbClr val="D1D1D1"/>
           </a:solidFill>
           <a:ln>
             <a:noFill/>
@@ -1622,7 +1624,7 @@
           <a:p>
             <a:endParaRPr lang="en-US" sz="1800">
               <a:solidFill>
-                <a:srgbClr val="20354A"/>
+                <a:srgbClr val="1F1F1F"/>
               </a:solidFill>
               <a:latin typeface="Arial"/>
               <a:ea typeface="Arial"/>
@@ -1658,7 +1660,7 @@
             <a:r>
               <a:rPr lang="en-US" sz="2200" b="1">
                 <a:solidFill>
-                  <a:srgbClr val="183B56"/>
+                  <a:srgbClr val="333333"/>
                 </a:solidFill>
                 <a:latin typeface="Arial"/>
                 <a:ea typeface="Arial"/>
@@ -1683,7 +1685,7 @@
             <a:avLst/>
           </a:prstGeom>
           <a:solidFill>
-            <a:srgbClr val="008C95"/>
+            <a:srgbClr val="70AD47"/>
           </a:solidFill>
           <a:ln>
             <a:noFill/>
@@ -1697,7 +1699,7 @@
           <a:p>
             <a:endParaRPr lang="en-US" sz="1800">
               <a:solidFill>
-                <a:srgbClr val="20354A"/>
+                <a:srgbClr val="1F1F1F"/>
               </a:solidFill>
               <a:latin typeface="Arial"/>
               <a:ea typeface="Arial"/>
@@ -1733,7 +1735,7 @@
             <a:r>
               <a:rPr lang="en-US" sz="1800">
                 <a:solidFill>
-                  <a:srgbClr val="20354A"/>
+                  <a:srgbClr val="1F1F1F"/>
                 </a:solidFill>
                 <a:latin typeface="Arial"/>
                 <a:ea typeface="Arial"/>
@@ -1758,7 +1760,7 @@
             <a:avLst/>
           </a:prstGeom>
           <a:solidFill>
-            <a:srgbClr val="008C95"/>
+            <a:srgbClr val="70AD47"/>
           </a:solidFill>
           <a:ln>
             <a:noFill/>
@@ -1772,7 +1774,7 @@
           <a:p>
             <a:endParaRPr lang="en-US" sz="1800">
               <a:solidFill>
-                <a:srgbClr val="20354A"/>
+                <a:srgbClr val="1F1F1F"/>
               </a:solidFill>
               <a:latin typeface="Arial"/>
               <a:ea typeface="Arial"/>
@@ -1808,7 +1810,7 @@
             <a:r>
               <a:rPr lang="en-US" sz="1800">
                 <a:solidFill>
-                  <a:srgbClr val="20354A"/>
+                  <a:srgbClr val="1F1F1F"/>
                 </a:solidFill>
                 <a:latin typeface="Arial"/>
                 <a:ea typeface="Arial"/>
@@ -1833,7 +1835,7 @@
             <a:avLst/>
           </a:prstGeom>
           <a:solidFill>
-            <a:srgbClr val="008C95"/>
+            <a:srgbClr val="70AD47"/>
           </a:solidFill>
           <a:ln>
             <a:noFill/>
@@ -1847,7 +1849,7 @@
           <a:p>
             <a:endParaRPr lang="en-US" sz="1800">
               <a:solidFill>
-                <a:srgbClr val="20354A"/>
+                <a:srgbClr val="1F1F1F"/>
               </a:solidFill>
               <a:latin typeface="Arial"/>
               <a:ea typeface="Arial"/>
@@ -1883,7 +1885,7 @@
             <a:r>
               <a:rPr lang="en-US" sz="1800">
                 <a:solidFill>
-                  <a:srgbClr val="20354A"/>
+                  <a:srgbClr val="1F1F1F"/>
                 </a:solidFill>
                 <a:latin typeface="Arial"/>
                 <a:ea typeface="Arial"/>
@@ -1911,7 +1913,7 @@
             </a:avLst>
           </a:prstGeom>
           <a:solidFill>
-            <a:srgbClr val="DF973E"/>
+            <a:srgbClr val="ED7D31"/>
           </a:solidFill>
           <a:ln>
             <a:noFill/>
@@ -1925,7 +1927,7 @@
           <a:p>
             <a:endParaRPr lang="en-US" sz="1800">
               <a:solidFill>
-                <a:srgbClr val="20354A"/>
+                <a:srgbClr val="1F1F1F"/>
               </a:solidFill>
               <a:latin typeface="Arial"/>
               <a:ea typeface="Arial"/>
@@ -1951,7 +1953,7 @@
             </a:avLst>
           </a:prstGeom>
           <a:solidFill>
-            <a:srgbClr val="91A5B5"/>
+            <a:srgbClr val="A0A0A0"/>
           </a:solidFill>
           <a:ln>
             <a:noFill/>
@@ -1965,7 +1967,7 @@
           <a:p>
             <a:endParaRPr lang="en-US" sz="1800">
               <a:solidFill>
-                <a:srgbClr val="20354A"/>
+                <a:srgbClr val="1F1F1F"/>
               </a:solidFill>
               <a:latin typeface="Arial"/>
               <a:ea typeface="Arial"/>
@@ -1982,7 +1984,7 @@
           <p:nvPr/>
         </p:nvPicPr>
         <p:blipFill>
-          <a:blip xmlns:r="http://schemas.openxmlformats.org/officeDocument/2006/relationships" r:embed="R65d3e6a315c44c49"/>
+          <a:blip xmlns:r="http://schemas.openxmlformats.org/officeDocument/2006/relationships" r:embed="R1df86a070b63424b"/>
           <a:srcRect l="12280" t="25518" r="12200" b="19936"/>
           <a:stretch>
             <a:fillRect/>
@@ -2007,7 +2009,7 @@
           <p:nvPr/>
         </p:nvPicPr>
         <p:blipFill>
-          <a:blip xmlns:r="http://schemas.openxmlformats.org/officeDocument/2006/relationships" r:embed="Rc3daf020571c4aa5"/>
+          <a:blip xmlns:r="http://schemas.openxmlformats.org/officeDocument/2006/relationships" r:embed="R58db65474bce45e4"/>
           <a:srcRect l="21371" t="23684" r="21291" b="20972"/>
           <a:stretch>
             <a:fillRect/>
@@ -2032,7 +2034,7 @@
           <p:nvPr/>
         </p:nvPicPr>
         <p:blipFill>
-          <a:blip xmlns:r="http://schemas.openxmlformats.org/officeDocument/2006/relationships" r:embed="R17646a6781ab4f24"/>
+          <a:blip xmlns:r="http://schemas.openxmlformats.org/officeDocument/2006/relationships" r:embed="Rea4abe8966b84e5e"/>
           <a:srcRect l="21371" t="23684" r="21291" b="20972"/>
           <a:stretch>
             <a:fillRect/>
@@ -2057,7 +2059,7 @@
           <p:nvPr/>
         </p:nvPicPr>
         <p:blipFill>
-          <a:blip xmlns:r="http://schemas.openxmlformats.org/officeDocument/2006/relationships" r:embed="R9548d3dd9b064b29"/>
+          <a:blip xmlns:r="http://schemas.openxmlformats.org/officeDocument/2006/relationships" r:embed="Rf87c7e8df666413e"/>
           <a:srcRect l="21371" t="23684" r="21291" b="20972"/>
           <a:stretch>
             <a:fillRect/>
@@ -2091,7 +2093,7 @@
             </a:avLst>
           </a:prstGeom>
           <a:solidFill>
-            <a:srgbClr val="DF973E"/>
+            <a:srgbClr val="ED7D31"/>
           </a:solidFill>
           <a:ln>
             <a:noFill/>
@@ -2105,7 +2107,7 @@
           <a:p>
             <a:endParaRPr lang="en-US" sz="1800">
               <a:solidFill>
-                <a:srgbClr val="20354A"/>
+                <a:srgbClr val="1F1F1F"/>
               </a:solidFill>
               <a:latin typeface="Arial"/>
               <a:ea typeface="Arial"/>
@@ -2142,7 +2144,7 @@
             <a:r>
               <a:rPr lang="en-US" sz="1000">
                 <a:solidFill>
-                  <a:srgbClr val="607184"/>
+                  <a:srgbClr val="898989"/>
                 </a:solidFill>
                 <a:latin typeface="Arial"/>
                 <a:ea typeface="Arial"/>
@@ -2174,13 +2176,13 @@
         <a:srgbClr val="E7E6E6"/>
       </a:lt2>
       <a:accent1>
-        <a:srgbClr val="183B56"/>
+        <a:srgbClr val="C00000"/>
       </a:accent1>
       <a:accent2>
-        <a:srgbClr val="008C95"/>
+        <a:srgbClr val="70AD47"/>
       </a:accent2>
       <a:accent3>
-        <a:srgbClr val="DF973E"/>
+        <a:srgbClr val="ED7D31"/>
       </a:accent3>
       <a:accent4>
         <a:srgbClr val="FFC000"/>
